--- a/presentation/team-slide.pptx
+++ b/presentation/team-slide.pptx
@@ -3301,7 +3301,7 @@
       </p:sp>
       <p:pic>
         <p:nvPicPr>
-          <p:cNvPr id="7" name="Picture 6" descr="team-avatar-round.png"/>
+          <p:cNvPr id="7" name="Picture 6" descr="avatar_pavel_round.png"/>
           <p:cNvPicPr>
             <a:picLocks noChangeAspect="1"/>
           </p:cNvPicPr>
@@ -3510,14 +3510,14 @@
       </p:sp>
       <p:pic>
         <p:nvPicPr>
-          <p:cNvPr id="13" name="Picture 12" descr="team-avatar-round.png"/>
+          <p:cNvPr id="13" name="Picture 12" descr="avatar_nikita_round.png"/>
           <p:cNvPicPr>
             <a:picLocks noChangeAspect="1"/>
           </p:cNvPicPr>
           <p:nvPr/>
         </p:nvPicPr>
         <p:blipFill>
-          <a:blip r:embed="rId2"/>
+          <a:blip r:embed="rId4"/>
           <a:stretch>
             <a:fillRect/>
           </a:stretch>
@@ -3658,7 +3658,7 @@
           <p:nvPr/>
         </p:nvPicPr>
         <p:blipFill>
-          <a:blip r:embed="rId4"/>
+          <a:blip r:embed="rId5"/>
           <a:stretch>
             <a:fillRect/>
           </a:stretch>
@@ -3942,7 +3942,7 @@
       </p:sp>
       <p:pic>
         <p:nvPicPr>
-          <p:cNvPr id="7" name="Picture 6" descr="team-avatar-round.png"/>
+          <p:cNvPr id="7" name="Picture 6" descr="avatar_pavel_round.png"/>
           <p:cNvPicPr>
             <a:picLocks noChangeAspect="1"/>
           </p:cNvPicPr>
@@ -4151,14 +4151,14 @@
       </p:sp>
       <p:pic>
         <p:nvPicPr>
-          <p:cNvPr id="13" name="Picture 12" descr="team-avatar-round.png"/>
+          <p:cNvPr id="13" name="Picture 12" descr="avatar_nikita_round.png"/>
           <p:cNvPicPr>
             <a:picLocks noChangeAspect="1"/>
           </p:cNvPicPr>
           <p:nvPr/>
         </p:nvPicPr>
         <p:blipFill>
-          <a:blip r:embed="rId2"/>
+          <a:blip r:embed="rId4"/>
           <a:stretch>
             <a:fillRect/>
           </a:stretch>
@@ -4299,7 +4299,7 @@
           <p:nvPr/>
         </p:nvPicPr>
         <p:blipFill>
-          <a:blip r:embed="rId4"/>
+          <a:blip r:embed="rId5"/>
           <a:stretch>
             <a:fillRect/>
           </a:stretch>
